--- a/Diploma Bitcoin/Capítulo 10 — Porquê o Bitcoin?/DB 2025 Capítulo 10 — Sessão prática.pptx
+++ b/Diploma Bitcoin/Capítulo 10 — Porquê o Bitcoin?/DB 2025 Capítulo 10 — Sessão prática.pptx
@@ -5,14 +5,15 @@
     <p:sldMasterId id="2147483678" r:id="rId1"/>
   </p:sldMasterIdLst>
   <p:notesMasterIdLst>
-    <p:notesMasterId r:id="rId7"/>
+    <p:notesMasterId r:id="rId8"/>
   </p:notesMasterIdLst>
   <p:sldIdLst>
     <p:sldId id="260" r:id="rId2"/>
     <p:sldId id="276" r:id="rId3"/>
     <p:sldId id="263" r:id="rId4"/>
-    <p:sldId id="270" r:id="rId5"/>
-    <p:sldId id="268" r:id="rId6"/>
+    <p:sldId id="277" r:id="rId5"/>
+    <p:sldId id="270" r:id="rId6"/>
+    <p:sldId id="268" r:id="rId7"/>
   </p:sldIdLst>
   <p:sldSz cx="20104100" cy="11309350"/>
   <p:notesSz cx="20104100" cy="11309350"/>
@@ -122,7 +123,7 @@
           <a:p>
             <a:fld id="{2D806190-753F-B441-B6BD-4CD1B6C676A4}" type="datetimeFigureOut">
               <a:rPr lang="en-PT" smtClean="0"/>
-              <a:t>26/11/2025</a:t>
+              <a:t>17/04/2026</a:t>
             </a:fld>
             <a:endParaRPr lang="en-PT"/>
           </a:p>
@@ -661,7 +662,7 @@
           <a:p>
             <a:fld id="{732BDFA0-B2CB-F643-A7D4-44C1F02A8DE8}" type="slidenum">
               <a:rPr lang="en-PT" smtClean="0"/>
-              <a:t>5</a:t>
+              <a:t>6</a:t>
             </a:fld>
             <a:endParaRPr lang="en-PT"/>
           </a:p>
@@ -5687,10 +5688,10 @@
                 <a:ea typeface="Open Sans" panose="020B0606030504020204" pitchFamily="34" charset="0"/>
                 <a:cs typeface="Open Sans" panose="020B0606030504020204" pitchFamily="34" charset="0"/>
               </a:rPr>
-              <a:t>Vamos perceber e</a:t>
-            </a:r>
-            <a:r>
-              <a:rPr lang="pt-PT" sz="2400" b="1" dirty="0">
+              <a:t>Vamos testar o teu conhecimento através de um </a:t>
+            </a:r>
+            <a:r>
+              <a:rPr lang="pt-PT" sz="2400" b="1" i="1" spc="10" dirty="0" err="1">
                 <a:solidFill>
                   <a:srgbClr val="392569"/>
                 </a:solidFill>
@@ -5698,7 +5699,7 @@
                 <a:ea typeface="Open Sans" panose="020B0606030504020204" pitchFamily="34" charset="0"/>
                 <a:cs typeface="Open Sans" panose="020B0606030504020204" pitchFamily="34" charset="0"/>
               </a:rPr>
-              <a:t>m que medida mudaste a tua perspetiva</a:t>
+              <a:t>quiz</a:t>
             </a:r>
             <a:r>
               <a:rPr lang="pt-PT" sz="2400" b="1" spc="10" dirty="0">
@@ -5709,7 +5710,7 @@
                 <a:ea typeface="Open Sans" panose="020B0606030504020204" pitchFamily="34" charset="0"/>
                 <a:cs typeface="Open Sans" panose="020B0606030504020204" pitchFamily="34" charset="0"/>
               </a:rPr>
-              <a:t> </a:t>
+              <a:t>!</a:t>
             </a:r>
           </a:p>
         </p:txBody>
@@ -5744,6 +5745,553 @@
           <a:chExt cx="0" cy="0"/>
         </a:xfrm>
       </p:grpSpPr>
+      <p:sp>
+        <p:nvSpPr>
+          <p:cNvPr id="5" name="Title 1">
+            <a:extLst>
+              <a:ext uri="{FF2B5EF4-FFF2-40B4-BE49-F238E27FC236}">
+                <a16:creationId xmlns:a16="http://schemas.microsoft.com/office/drawing/2014/main" id="{00F3F224-611C-B1C7-55AD-92711F328CD9}"/>
+              </a:ext>
+            </a:extLst>
+          </p:cNvPr>
+          <p:cNvSpPr>
+            <a:spLocks noGrp="1"/>
+          </p:cNvSpPr>
+          <p:nvPr>
+            <p:ph type="title"/>
+          </p:nvPr>
+        </p:nvSpPr>
+        <p:spPr>
+          <a:xfrm>
+            <a:off x="1384300" y="754063"/>
+            <a:ext cx="8439150" cy="1364400"/>
+          </a:xfrm>
+        </p:spPr>
+        <p:txBody>
+          <a:bodyPr/>
+          <a:lstStyle/>
+          <a:p>
+            <a:r>
+              <a:rPr lang="pt-PT" dirty="0"/>
+              <a:t>Atividade</a:t>
+            </a:r>
+          </a:p>
+        </p:txBody>
+      </p:sp>
+      <p:sp>
+        <p:nvSpPr>
+          <p:cNvPr id="6" name="Text Placeholder 3">
+            <a:extLst>
+              <a:ext uri="{FF2B5EF4-FFF2-40B4-BE49-F238E27FC236}">
+                <a16:creationId xmlns:a16="http://schemas.microsoft.com/office/drawing/2014/main" id="{95E80E70-46A0-F798-093B-DCD7CCACE6C3}"/>
+              </a:ext>
+            </a:extLst>
+          </p:cNvPr>
+          <p:cNvSpPr txBox="1">
+            <a:spLocks/>
+          </p:cNvSpPr>
+          <p:nvPr/>
+        </p:nvSpPr>
+        <p:spPr>
+          <a:xfrm>
+            <a:off x="1384300" y="2118464"/>
+            <a:ext cx="17202150" cy="1707412"/>
+          </a:xfrm>
+          <a:prstGeom prst="rect">
+            <a:avLst/>
+          </a:prstGeom>
+        </p:spPr>
+        <p:txBody>
+          <a:bodyPr vert="horz" lIns="91440" tIns="45720" rIns="91440" bIns="45720" rtlCol="0">
+            <a:noAutofit/>
+          </a:bodyPr>
+          <a:lstStyle>
+            <a:lvl1pPr marL="228600" indent="-228600" algn="l" defTabSz="914400" rtl="0" eaLnBrk="1" latinLnBrk="0" hangingPunct="1">
+              <a:lnSpc>
+                <a:spcPct val="150000"/>
+              </a:lnSpc>
+              <a:spcBef>
+                <a:spcPts val="1000"/>
+              </a:spcBef>
+              <a:buFont typeface="Arial" panose="020B0604020202020204" pitchFamily="34" charset="0"/>
+              <a:buChar char="•"/>
+              <a:defRPr sz="3200" kern="1200">
+                <a:solidFill>
+                  <a:srgbClr val="58595B"/>
+                </a:solidFill>
+                <a:latin typeface="Open Sans" panose="020B0606030504020204" pitchFamily="34" charset="0"/>
+                <a:ea typeface="Open Sans" panose="020B0606030504020204" pitchFamily="34" charset="0"/>
+                <a:cs typeface="Open Sans" panose="020B0606030504020204" pitchFamily="34" charset="0"/>
+              </a:defRPr>
+            </a:lvl1pPr>
+            <a:lvl2pPr marL="685800" indent="-228600" algn="l" defTabSz="914400" rtl="0" eaLnBrk="1" latinLnBrk="0" hangingPunct="1">
+              <a:lnSpc>
+                <a:spcPct val="150000"/>
+              </a:lnSpc>
+              <a:spcBef>
+                <a:spcPts val="500"/>
+              </a:spcBef>
+              <a:buFont typeface="Arial" panose="020B0604020202020204" pitchFamily="34" charset="0"/>
+              <a:buChar char="•"/>
+              <a:defRPr lang="en-PT" sz="2800" kern="1200" spc="-10" dirty="0" smtClean="0">
+                <a:solidFill>
+                  <a:srgbClr val="58595B"/>
+                </a:solidFill>
+                <a:latin typeface="Open Sans" panose="020B0606030504020204" pitchFamily="34" charset="0"/>
+                <a:ea typeface="Open Sans" panose="020B0606030504020204" pitchFamily="34" charset="0"/>
+                <a:cs typeface="Open Sans" panose="020B0606030504020204" pitchFamily="34" charset="0"/>
+              </a:defRPr>
+            </a:lvl2pPr>
+            <a:lvl3pPr marL="1143000" indent="-228600" algn="l" defTabSz="914400" rtl="0" eaLnBrk="1" latinLnBrk="0" hangingPunct="1">
+              <a:lnSpc>
+                <a:spcPct val="150000"/>
+              </a:lnSpc>
+              <a:spcBef>
+                <a:spcPts val="500"/>
+              </a:spcBef>
+              <a:buFont typeface="Arial" panose="020B0604020202020204" pitchFamily="34" charset="0"/>
+              <a:buChar char="•"/>
+              <a:defRPr sz="2400" kern="1200">
+                <a:solidFill>
+                  <a:srgbClr val="58595B"/>
+                </a:solidFill>
+                <a:latin typeface="Open Sans" panose="020B0606030504020204" pitchFamily="34" charset="0"/>
+                <a:ea typeface="Open Sans" panose="020B0606030504020204" pitchFamily="34" charset="0"/>
+                <a:cs typeface="Open Sans" panose="020B0606030504020204" pitchFamily="34" charset="0"/>
+              </a:defRPr>
+            </a:lvl3pPr>
+            <a:lvl4pPr marL="1600200" indent="-228600" algn="l" defTabSz="914400" rtl="0" eaLnBrk="1" latinLnBrk="0" hangingPunct="1">
+              <a:lnSpc>
+                <a:spcPct val="150000"/>
+              </a:lnSpc>
+              <a:spcBef>
+                <a:spcPts val="500"/>
+              </a:spcBef>
+              <a:buFont typeface="Arial" panose="020B0604020202020204" pitchFamily="34" charset="0"/>
+              <a:buChar char="•"/>
+              <a:defRPr sz="2000" kern="1200">
+                <a:solidFill>
+                  <a:srgbClr val="58595B"/>
+                </a:solidFill>
+                <a:latin typeface="Open Sans" panose="020B0606030504020204" pitchFamily="34" charset="0"/>
+                <a:ea typeface="Open Sans" panose="020B0606030504020204" pitchFamily="34" charset="0"/>
+                <a:cs typeface="Open Sans" panose="020B0606030504020204" pitchFamily="34" charset="0"/>
+              </a:defRPr>
+            </a:lvl4pPr>
+            <a:lvl5pPr marL="2057400" indent="-228600" algn="l" defTabSz="914400" rtl="0" eaLnBrk="1" latinLnBrk="0" hangingPunct="1">
+              <a:lnSpc>
+                <a:spcPct val="150000"/>
+              </a:lnSpc>
+              <a:spcBef>
+                <a:spcPts val="500"/>
+              </a:spcBef>
+              <a:buFont typeface="Arial" panose="020B0604020202020204" pitchFamily="34" charset="0"/>
+              <a:buChar char="•"/>
+              <a:defRPr sz="2000" kern="1200">
+                <a:solidFill>
+                  <a:srgbClr val="58595B"/>
+                </a:solidFill>
+                <a:latin typeface="Open Sans" panose="020B0606030504020204" pitchFamily="34" charset="0"/>
+                <a:ea typeface="Open Sans" panose="020B0606030504020204" pitchFamily="34" charset="0"/>
+                <a:cs typeface="Open Sans" panose="020B0606030504020204" pitchFamily="34" charset="0"/>
+              </a:defRPr>
+            </a:lvl5pPr>
+            <a:lvl6pPr marL="2514600" indent="-228600" algn="l" defTabSz="914400" rtl="0" eaLnBrk="1" latinLnBrk="0" hangingPunct="1">
+              <a:lnSpc>
+                <a:spcPct val="90000"/>
+              </a:lnSpc>
+              <a:spcBef>
+                <a:spcPts val="500"/>
+              </a:spcBef>
+              <a:buFont typeface="Arial" panose="020B0604020202020204" pitchFamily="34" charset="0"/>
+              <a:buChar char="•"/>
+              <a:defRPr sz="1800" kern="1200">
+                <a:solidFill>
+                  <a:schemeClr val="tx1"/>
+                </a:solidFill>
+                <a:latin typeface="+mn-lt"/>
+                <a:ea typeface="+mn-ea"/>
+                <a:cs typeface="+mn-cs"/>
+              </a:defRPr>
+            </a:lvl6pPr>
+            <a:lvl7pPr marL="2971800" indent="-228600" algn="l" defTabSz="914400" rtl="0" eaLnBrk="1" latinLnBrk="0" hangingPunct="1">
+              <a:lnSpc>
+                <a:spcPct val="90000"/>
+              </a:lnSpc>
+              <a:spcBef>
+                <a:spcPts val="500"/>
+              </a:spcBef>
+              <a:buFont typeface="Arial" panose="020B0604020202020204" pitchFamily="34" charset="0"/>
+              <a:buChar char="•"/>
+              <a:defRPr sz="1800" kern="1200">
+                <a:solidFill>
+                  <a:schemeClr val="tx1"/>
+                </a:solidFill>
+                <a:latin typeface="+mn-lt"/>
+                <a:ea typeface="+mn-ea"/>
+                <a:cs typeface="+mn-cs"/>
+              </a:defRPr>
+            </a:lvl7pPr>
+            <a:lvl8pPr marL="3429000" indent="-228600" algn="l" defTabSz="914400" rtl="0" eaLnBrk="1" latinLnBrk="0" hangingPunct="1">
+              <a:lnSpc>
+                <a:spcPct val="90000"/>
+              </a:lnSpc>
+              <a:spcBef>
+                <a:spcPts val="500"/>
+              </a:spcBef>
+              <a:buFont typeface="Arial" panose="020B0604020202020204" pitchFamily="34" charset="0"/>
+              <a:buChar char="•"/>
+              <a:defRPr sz="1800" kern="1200">
+                <a:solidFill>
+                  <a:schemeClr val="tx1"/>
+                </a:solidFill>
+                <a:latin typeface="+mn-lt"/>
+                <a:ea typeface="+mn-ea"/>
+                <a:cs typeface="+mn-cs"/>
+              </a:defRPr>
+            </a:lvl8pPr>
+            <a:lvl9pPr marL="3886200" indent="-228600" algn="l" defTabSz="914400" rtl="0" eaLnBrk="1" latinLnBrk="0" hangingPunct="1">
+              <a:lnSpc>
+                <a:spcPct val="90000"/>
+              </a:lnSpc>
+              <a:spcBef>
+                <a:spcPts val="500"/>
+              </a:spcBef>
+              <a:buFont typeface="Arial" panose="020B0604020202020204" pitchFamily="34" charset="0"/>
+              <a:buChar char="•"/>
+              <a:defRPr sz="1800" kern="1200">
+                <a:solidFill>
+                  <a:schemeClr val="tx1"/>
+                </a:solidFill>
+                <a:latin typeface="+mn-lt"/>
+                <a:ea typeface="+mn-ea"/>
+                <a:cs typeface="+mn-cs"/>
+              </a:defRPr>
+            </a:lvl9pPr>
+          </a:lstStyle>
+          <a:p>
+            <a:pPr marL="0" indent="0">
+              <a:buFont typeface="Arial" panose="020B0604020202020204" pitchFamily="34" charset="0"/>
+              <a:buNone/>
+            </a:pPr>
+            <a:r>
+              <a:rPr lang="pt-PT" b="1" dirty="0"/>
+              <a:t>Responde individualmente ao </a:t>
+            </a:r>
+            <a:r>
+              <a:rPr lang="pt-PT" b="1" i="1" dirty="0" err="1"/>
+              <a:t>quiz</a:t>
+            </a:r>
+            <a:r>
+              <a:rPr lang="pt-PT" b="1" dirty="0"/>
+              <a:t> e partilha o teu resultado com a turma.</a:t>
+            </a:r>
+          </a:p>
+          <a:p>
+            <a:pPr marL="0" indent="0">
+              <a:buFont typeface="Arial" panose="020B0604020202020204" pitchFamily="34" charset="0"/>
+              <a:buNone/>
+            </a:pPr>
+            <a:r>
+              <a:rPr lang="pt-PT" b="1" dirty="0"/>
+              <a:t>Acede ao </a:t>
+            </a:r>
+            <a:r>
+              <a:rPr lang="pt-PT" b="1" i="1" dirty="0" err="1"/>
+              <a:t>quiz</a:t>
+            </a:r>
+            <a:r>
+              <a:rPr lang="pt-PT" b="1" dirty="0"/>
+              <a:t> através do seguinte link:</a:t>
+            </a:r>
+          </a:p>
+        </p:txBody>
+      </p:sp>
+      <p:sp>
+        <p:nvSpPr>
+          <p:cNvPr id="7" name="Text Placeholder 3">
+            <a:extLst>
+              <a:ext uri="{FF2B5EF4-FFF2-40B4-BE49-F238E27FC236}">
+                <a16:creationId xmlns:a16="http://schemas.microsoft.com/office/drawing/2014/main" id="{D4A62EED-DE28-F9A6-519D-9FECD8DDB013}"/>
+              </a:ext>
+            </a:extLst>
+          </p:cNvPr>
+          <p:cNvSpPr txBox="1">
+            <a:spLocks/>
+          </p:cNvSpPr>
+          <p:nvPr/>
+        </p:nvSpPr>
+        <p:spPr>
+          <a:xfrm>
+            <a:off x="5251450" y="9288464"/>
+            <a:ext cx="9601200" cy="1243011"/>
+          </a:xfrm>
+          <a:prstGeom prst="rect">
+            <a:avLst/>
+          </a:prstGeom>
+        </p:spPr>
+        <p:txBody>
+          <a:bodyPr vert="horz" lIns="91440" tIns="45720" rIns="91440" bIns="45720" rtlCol="0">
+            <a:normAutofit/>
+          </a:bodyPr>
+          <a:lstStyle>
+            <a:lvl1pPr marL="228600" indent="-228600" algn="l" defTabSz="914400" rtl="0" eaLnBrk="1" latinLnBrk="0" hangingPunct="1">
+              <a:lnSpc>
+                <a:spcPct val="150000"/>
+              </a:lnSpc>
+              <a:spcBef>
+                <a:spcPts val="1000"/>
+              </a:spcBef>
+              <a:buFont typeface="Arial" panose="020B0604020202020204" pitchFamily="34" charset="0"/>
+              <a:buChar char="•"/>
+              <a:defRPr sz="3200" kern="1200">
+                <a:solidFill>
+                  <a:srgbClr val="58595B"/>
+                </a:solidFill>
+                <a:latin typeface="Open Sans" panose="020B0606030504020204" pitchFamily="34" charset="0"/>
+                <a:ea typeface="Open Sans" panose="020B0606030504020204" pitchFamily="34" charset="0"/>
+                <a:cs typeface="Open Sans" panose="020B0606030504020204" pitchFamily="34" charset="0"/>
+              </a:defRPr>
+            </a:lvl1pPr>
+            <a:lvl2pPr marL="685800" indent="-228600" algn="l" defTabSz="914400" rtl="0" eaLnBrk="1" latinLnBrk="0" hangingPunct="1">
+              <a:lnSpc>
+                <a:spcPct val="150000"/>
+              </a:lnSpc>
+              <a:spcBef>
+                <a:spcPts val="500"/>
+              </a:spcBef>
+              <a:buFont typeface="Arial" panose="020B0604020202020204" pitchFamily="34" charset="0"/>
+              <a:buChar char="•"/>
+              <a:defRPr lang="en-PT" sz="2800" kern="1200" spc="-10" dirty="0" smtClean="0">
+                <a:solidFill>
+                  <a:srgbClr val="58595B"/>
+                </a:solidFill>
+                <a:latin typeface="Open Sans" panose="020B0606030504020204" pitchFamily="34" charset="0"/>
+                <a:ea typeface="Open Sans" panose="020B0606030504020204" pitchFamily="34" charset="0"/>
+                <a:cs typeface="Open Sans" panose="020B0606030504020204" pitchFamily="34" charset="0"/>
+              </a:defRPr>
+            </a:lvl2pPr>
+            <a:lvl3pPr marL="1143000" indent="-228600" algn="l" defTabSz="914400" rtl="0" eaLnBrk="1" latinLnBrk="0" hangingPunct="1">
+              <a:lnSpc>
+                <a:spcPct val="150000"/>
+              </a:lnSpc>
+              <a:spcBef>
+                <a:spcPts val="500"/>
+              </a:spcBef>
+              <a:buFont typeface="Arial" panose="020B0604020202020204" pitchFamily="34" charset="0"/>
+              <a:buChar char="•"/>
+              <a:defRPr sz="2400" kern="1200">
+                <a:solidFill>
+                  <a:srgbClr val="58595B"/>
+                </a:solidFill>
+                <a:latin typeface="Open Sans" panose="020B0606030504020204" pitchFamily="34" charset="0"/>
+                <a:ea typeface="Open Sans" panose="020B0606030504020204" pitchFamily="34" charset="0"/>
+                <a:cs typeface="Open Sans" panose="020B0606030504020204" pitchFamily="34" charset="0"/>
+              </a:defRPr>
+            </a:lvl3pPr>
+            <a:lvl4pPr marL="1600200" indent="-228600" algn="l" defTabSz="914400" rtl="0" eaLnBrk="1" latinLnBrk="0" hangingPunct="1">
+              <a:lnSpc>
+                <a:spcPct val="150000"/>
+              </a:lnSpc>
+              <a:spcBef>
+                <a:spcPts val="500"/>
+              </a:spcBef>
+              <a:buFont typeface="Arial" panose="020B0604020202020204" pitchFamily="34" charset="0"/>
+              <a:buChar char="•"/>
+              <a:defRPr sz="2000" kern="1200">
+                <a:solidFill>
+                  <a:srgbClr val="58595B"/>
+                </a:solidFill>
+                <a:latin typeface="Open Sans" panose="020B0606030504020204" pitchFamily="34" charset="0"/>
+                <a:ea typeface="Open Sans" panose="020B0606030504020204" pitchFamily="34" charset="0"/>
+                <a:cs typeface="Open Sans" panose="020B0606030504020204" pitchFamily="34" charset="0"/>
+              </a:defRPr>
+            </a:lvl4pPr>
+            <a:lvl5pPr marL="2057400" indent="-228600" algn="l" defTabSz="914400" rtl="0" eaLnBrk="1" latinLnBrk="0" hangingPunct="1">
+              <a:lnSpc>
+                <a:spcPct val="150000"/>
+              </a:lnSpc>
+              <a:spcBef>
+                <a:spcPts val="500"/>
+              </a:spcBef>
+              <a:buFont typeface="Arial" panose="020B0604020202020204" pitchFamily="34" charset="0"/>
+              <a:buChar char="•"/>
+              <a:defRPr sz="2000" kern="1200">
+                <a:solidFill>
+                  <a:srgbClr val="58595B"/>
+                </a:solidFill>
+                <a:latin typeface="Open Sans" panose="020B0606030504020204" pitchFamily="34" charset="0"/>
+                <a:ea typeface="Open Sans" panose="020B0606030504020204" pitchFamily="34" charset="0"/>
+                <a:cs typeface="Open Sans" panose="020B0606030504020204" pitchFamily="34" charset="0"/>
+              </a:defRPr>
+            </a:lvl5pPr>
+            <a:lvl6pPr marL="2514600" indent="-228600" algn="l" defTabSz="914400" rtl="0" eaLnBrk="1" latinLnBrk="0" hangingPunct="1">
+              <a:lnSpc>
+                <a:spcPct val="90000"/>
+              </a:lnSpc>
+              <a:spcBef>
+                <a:spcPts val="500"/>
+              </a:spcBef>
+              <a:buFont typeface="Arial" panose="020B0604020202020204" pitchFamily="34" charset="0"/>
+              <a:buChar char="•"/>
+              <a:defRPr sz="1800" kern="1200">
+                <a:solidFill>
+                  <a:schemeClr val="tx1"/>
+                </a:solidFill>
+                <a:latin typeface="+mn-lt"/>
+                <a:ea typeface="+mn-ea"/>
+                <a:cs typeface="+mn-cs"/>
+              </a:defRPr>
+            </a:lvl6pPr>
+            <a:lvl7pPr marL="2971800" indent="-228600" algn="l" defTabSz="914400" rtl="0" eaLnBrk="1" latinLnBrk="0" hangingPunct="1">
+              <a:lnSpc>
+                <a:spcPct val="90000"/>
+              </a:lnSpc>
+              <a:spcBef>
+                <a:spcPts val="500"/>
+              </a:spcBef>
+              <a:buFont typeface="Arial" panose="020B0604020202020204" pitchFamily="34" charset="0"/>
+              <a:buChar char="•"/>
+              <a:defRPr sz="1800" kern="1200">
+                <a:solidFill>
+                  <a:schemeClr val="tx1"/>
+                </a:solidFill>
+                <a:latin typeface="+mn-lt"/>
+                <a:ea typeface="+mn-ea"/>
+                <a:cs typeface="+mn-cs"/>
+              </a:defRPr>
+            </a:lvl7pPr>
+            <a:lvl8pPr marL="3429000" indent="-228600" algn="l" defTabSz="914400" rtl="0" eaLnBrk="1" latinLnBrk="0" hangingPunct="1">
+              <a:lnSpc>
+                <a:spcPct val="90000"/>
+              </a:lnSpc>
+              <a:spcBef>
+                <a:spcPts val="500"/>
+              </a:spcBef>
+              <a:buFont typeface="Arial" panose="020B0604020202020204" pitchFamily="34" charset="0"/>
+              <a:buChar char="•"/>
+              <a:defRPr sz="1800" kern="1200">
+                <a:solidFill>
+                  <a:schemeClr val="tx1"/>
+                </a:solidFill>
+                <a:latin typeface="+mn-lt"/>
+                <a:ea typeface="+mn-ea"/>
+                <a:cs typeface="+mn-cs"/>
+              </a:defRPr>
+            </a:lvl8pPr>
+            <a:lvl9pPr marL="3886200" indent="-228600" algn="l" defTabSz="914400" rtl="0" eaLnBrk="1" latinLnBrk="0" hangingPunct="1">
+              <a:lnSpc>
+                <a:spcPct val="90000"/>
+              </a:lnSpc>
+              <a:spcBef>
+                <a:spcPts val="500"/>
+              </a:spcBef>
+              <a:buFont typeface="Arial" panose="020B0604020202020204" pitchFamily="34" charset="0"/>
+              <a:buChar char="•"/>
+              <a:defRPr sz="1800" kern="1200">
+                <a:solidFill>
+                  <a:schemeClr val="tx1"/>
+                </a:solidFill>
+                <a:latin typeface="+mn-lt"/>
+                <a:ea typeface="+mn-ea"/>
+                <a:cs typeface="+mn-cs"/>
+              </a:defRPr>
+            </a:lvl9pPr>
+          </a:lstStyle>
+          <a:p>
+            <a:pPr marL="0" indent="0" algn="ctr">
+              <a:buNone/>
+            </a:pPr>
+            <a:r>
+              <a:rPr lang="pt-PT" dirty="0" err="1"/>
+              <a:t>https</a:t>
+            </a:r>
+            <a:r>
+              <a:rPr lang="pt-PT" dirty="0"/>
+              <a:t>://</a:t>
+            </a:r>
+            <a:r>
+              <a:rPr lang="pt-PT" dirty="0" err="1"/>
+              <a:t>www.estudabitcoin.com</a:t>
+            </a:r>
+            <a:r>
+              <a:rPr lang="pt-PT" dirty="0"/>
+              <a:t>/jogo/</a:t>
+            </a:r>
+            <a:r>
+              <a:rPr lang="pt-PT" dirty="0" err="1"/>
+              <a:t>index.html</a:t>
+            </a:r>
+            <a:endParaRPr lang="pt-PT" dirty="0"/>
+          </a:p>
+        </p:txBody>
+      </p:sp>
+      <p:pic>
+        <p:nvPicPr>
+          <p:cNvPr id="10" name="Picture 9">
+            <a:extLst>
+              <a:ext uri="{FF2B5EF4-FFF2-40B4-BE49-F238E27FC236}">
+                <a16:creationId xmlns:a16="http://schemas.microsoft.com/office/drawing/2014/main" id="{7FD41A55-D501-B64A-5B46-3C75E05FB98B}"/>
+              </a:ext>
+            </a:extLst>
+          </p:cNvPr>
+          <p:cNvPicPr>
+            <a:picLocks noChangeAspect="1"/>
+          </p:cNvPicPr>
+          <p:nvPr/>
+        </p:nvPicPr>
+        <p:blipFill>
+          <a:blip r:embed="rId2">
+            <a:extLst>
+              <a:ext uri="{28A0092B-C50C-407E-A947-70E740481C1C}">
+                <a14:useLocalDpi xmlns:a14="http://schemas.microsoft.com/office/drawing/2010/main" val="0"/>
+              </a:ext>
+            </a:extLst>
+          </a:blip>
+          <a:stretch>
+            <a:fillRect/>
+          </a:stretch>
+        </p:blipFill>
+        <p:spPr>
+          <a:xfrm>
+            <a:off x="7953375" y="4975440"/>
+            <a:ext cx="4197350" cy="4197350"/>
+          </a:xfrm>
+          <a:prstGeom prst="rect">
+            <a:avLst/>
+          </a:prstGeom>
+        </p:spPr>
+      </p:pic>
+    </p:spTree>
+    <p:extLst>
+      <p:ext uri="{BB962C8B-B14F-4D97-AF65-F5344CB8AC3E}">
+        <p14:creationId xmlns:p14="http://schemas.microsoft.com/office/powerpoint/2010/main" val="323935426"/>
+      </p:ext>
+    </p:extLst>
+  </p:cSld>
+  <p:clrMapOvr>
+    <a:masterClrMapping/>
+  </p:clrMapOvr>
+</p:sld>
+</file>
+
+<file path=ppt/slides/slide5.xml><?xml version="1.0" encoding="utf-8"?>
+<p:sld xmlns:a="http://schemas.openxmlformats.org/drawingml/2006/main" xmlns:r="http://schemas.openxmlformats.org/officeDocument/2006/relationships" xmlns:p="http://schemas.openxmlformats.org/presentationml/2006/main">
+  <p:cSld>
+    <p:spTree>
+      <p:nvGrpSpPr>
+        <p:cNvPr id="1" name=""/>
+        <p:cNvGrpSpPr/>
+        <p:nvPr/>
+      </p:nvGrpSpPr>
+      <p:grpSpPr>
+        <a:xfrm>
+          <a:off x="0" y="0"/>
+          <a:ext cx="0" cy="0"/>
+          <a:chOff x="0" y="0"/>
+          <a:chExt cx="0" cy="0"/>
+        </a:xfrm>
+      </p:grpSpPr>
     </p:spTree>
     <p:extLst>
       <p:ext uri="{BB962C8B-B14F-4D97-AF65-F5344CB8AC3E}">
@@ -5757,7 +6305,7 @@
 </p:sld>
 </file>
 
-<file path=ppt/slides/slide5.xml><?xml version="1.0" encoding="utf-8"?>
+<file path=ppt/slides/slide6.xml><?xml version="1.0" encoding="utf-8"?>
 <p:sld xmlns:a="http://schemas.openxmlformats.org/drawingml/2006/main" xmlns:r="http://schemas.openxmlformats.org/officeDocument/2006/relationships" xmlns:p="http://schemas.openxmlformats.org/presentationml/2006/main">
   <p:cSld>
     <p:spTree>
